--- a/ppt/RAG03-RAG.pptx
+++ b/ppt/RAG03-RAG.pptx
@@ -3671,7 +3671,7 @@
         </p:nvSpPr>
         <p:spPr>
           <a:xfrm>
-            <a:off x="1115616" y="5661248"/>
+            <a:off x="1259632" y="5737324"/>
             <a:ext cx="6400800" cy="551554"/>
           </a:xfrm>
         </p:spPr>
@@ -3726,10 +3726,9 @@
           <a:p>
             <a:pPr algn="ctr"/>
             <a:r>
-              <a:rPr lang="fr-FR" sz="3600" dirty="0" err="1"/>
-              <a:t>Embedding</a:t>
-            </a:r>
-            <a:endParaRPr lang="fr-FR" sz="3600" dirty="0"/>
+              <a:rPr lang="fr-FR" sz="3600" dirty="0"/>
+              <a:t>RAG</a:t>
+            </a:r>
           </a:p>
         </p:txBody>
       </p:sp>

--- a/ppt/RAG03-RAG.pptx
+++ b/ppt/RAG03-RAG.pptx
@@ -5,19 +5,21 @@
     <p:sldMasterId id="2147483653" r:id="rId1"/>
   </p:sldMasterIdLst>
   <p:notesMasterIdLst>
-    <p:notesMasterId r:id="rId9"/>
+    <p:notesMasterId r:id="rId11"/>
   </p:notesMasterIdLst>
   <p:handoutMasterIdLst>
-    <p:handoutMasterId r:id="rId10"/>
+    <p:handoutMasterId r:id="rId12"/>
   </p:handoutMasterIdLst>
   <p:sldIdLst>
     <p:sldId id="264" r:id="rId2"/>
     <p:sldId id="265" r:id="rId3"/>
     <p:sldId id="266" r:id="rId4"/>
-    <p:sldId id="267" r:id="rId5"/>
-    <p:sldId id="277" r:id="rId6"/>
-    <p:sldId id="268" r:id="rId7"/>
-    <p:sldId id="276" r:id="rId8"/>
+    <p:sldId id="286" r:id="rId5"/>
+    <p:sldId id="287" r:id="rId6"/>
+    <p:sldId id="267" r:id="rId7"/>
+    <p:sldId id="277" r:id="rId8"/>
+    <p:sldId id="268" r:id="rId9"/>
+    <p:sldId id="276" r:id="rId10"/>
   </p:sldIdLst>
   <p:sldSz cx="9144000" cy="6858000" type="screen4x3"/>
   <p:notesSz cx="6648450" cy="9782175"/>
@@ -4012,6 +4014,237 @@
           <p:cNvPr id="2" name="Titre 1">
             <a:extLst>
               <a:ext uri="{FF2B5EF4-FFF2-40B4-BE49-F238E27FC236}">
+                <a16:creationId xmlns:a16="http://schemas.microsoft.com/office/drawing/2014/main" id="{FC9E766A-D7EB-8753-5BF7-41F5DAD3BE30}"/>
+              </a:ext>
+            </a:extLst>
+          </p:cNvPr>
+          <p:cNvSpPr>
+            <a:spLocks noGrp="1"/>
+          </p:cNvSpPr>
+          <p:nvPr>
+            <p:ph type="title"/>
+          </p:nvPr>
+        </p:nvSpPr>
+        <p:spPr/>
+        <p:txBody>
+          <a:bodyPr/>
+          <a:lstStyle/>
+          <a:p>
+            <a:endParaRPr lang="fr-FR"/>
+          </a:p>
+        </p:txBody>
+      </p:sp>
+      <p:pic>
+        <p:nvPicPr>
+          <p:cNvPr id="1026" name="Picture 2" descr="index_diagram">
+            <a:extLst>
+              <a:ext uri="{FF2B5EF4-FFF2-40B4-BE49-F238E27FC236}">
+                <a16:creationId xmlns:a16="http://schemas.microsoft.com/office/drawing/2014/main" id="{E97727BE-F777-EEDA-FD92-C4E4497C0F17}"/>
+              </a:ext>
+            </a:extLst>
+          </p:cNvPr>
+          <p:cNvPicPr>
+            <a:picLocks noGrp="1" noChangeAspect="1" noChangeArrowheads="1"/>
+          </p:cNvPicPr>
+          <p:nvPr>
+            <p:ph idx="1"/>
+          </p:nvPr>
+        </p:nvPicPr>
+        <p:blipFill>
+          <a:blip r:embed="rId2" cstate="print">
+            <a:extLst>
+              <a:ext uri="{28A0092B-C50C-407E-A947-70E740481C1C}">
+                <a14:useLocalDpi xmlns:a14="http://schemas.microsoft.com/office/drawing/2010/main" val="0"/>
+              </a:ext>
+            </a:extLst>
+          </a:blip>
+          <a:srcRect/>
+          <a:stretch>
+            <a:fillRect/>
+          </a:stretch>
+        </p:blipFill>
+        <p:spPr bwMode="auto">
+          <a:xfrm>
+            <a:off x="179388" y="1728761"/>
+            <a:ext cx="8766175" cy="4408540"/>
+          </a:xfrm>
+          <a:prstGeom prst="rect">
+            <a:avLst/>
+          </a:prstGeom>
+          <a:noFill/>
+          <a:extLst>
+            <a:ext uri="{909E8E84-426E-40DD-AFC4-6F175D3DCCD1}">
+              <a14:hiddenFill xmlns:a14="http://schemas.microsoft.com/office/drawing/2010/main">
+                <a:solidFill>
+                  <a:srgbClr val="FFFFFF"/>
+                </a:solidFill>
+              </a14:hiddenFill>
+            </a:ext>
+          </a:extLst>
+        </p:spPr>
+      </p:pic>
+    </p:spTree>
+    <p:extLst>
+      <p:ext uri="{BB962C8B-B14F-4D97-AF65-F5344CB8AC3E}">
+        <p14:creationId xmlns:p14="http://schemas.microsoft.com/office/powerpoint/2010/main" val="1727230546"/>
+      </p:ext>
+    </p:extLst>
+  </p:cSld>
+  <p:clrMapOvr>
+    <a:masterClrMapping/>
+  </p:clrMapOvr>
+</p:sld>
+</file>
+
+<file path=ppt/slides/slide5.xml><?xml version="1.0" encoding="utf-8"?>
+<p:sld xmlns:a="http://schemas.openxmlformats.org/drawingml/2006/main" xmlns:r="http://schemas.openxmlformats.org/officeDocument/2006/relationships" xmlns:p="http://schemas.openxmlformats.org/presentationml/2006/main">
+  <p:cSld>
+    <p:spTree>
+      <p:nvGrpSpPr>
+        <p:cNvPr id="1" name=""/>
+        <p:cNvGrpSpPr/>
+        <p:nvPr/>
+      </p:nvGrpSpPr>
+      <p:grpSpPr>
+        <a:xfrm>
+          <a:off x="0" y="0"/>
+          <a:ext cx="0" cy="0"/>
+          <a:chOff x="0" y="0"/>
+          <a:chExt cx="0" cy="0"/>
+        </a:xfrm>
+      </p:grpSpPr>
+      <p:sp>
+        <p:nvSpPr>
+          <p:cNvPr id="2" name="Titre 1">
+            <a:extLst>
+              <a:ext uri="{FF2B5EF4-FFF2-40B4-BE49-F238E27FC236}">
+                <a16:creationId xmlns:a16="http://schemas.microsoft.com/office/drawing/2014/main" id="{10B398C0-CFE9-352D-F9ED-CA3EE8AC95F4}"/>
+              </a:ext>
+            </a:extLst>
+          </p:cNvPr>
+          <p:cNvSpPr>
+            <a:spLocks noGrp="1"/>
+          </p:cNvSpPr>
+          <p:nvPr>
+            <p:ph type="title"/>
+          </p:nvPr>
+        </p:nvSpPr>
+        <p:spPr/>
+        <p:txBody>
+          <a:bodyPr/>
+          <a:lstStyle/>
+          <a:p>
+            <a:endParaRPr lang="fr-FR"/>
+          </a:p>
+        </p:txBody>
+      </p:sp>
+      <p:sp>
+        <p:nvSpPr>
+          <p:cNvPr id="3" name="Espace réservé du contenu 2">
+            <a:extLst>
+              <a:ext uri="{FF2B5EF4-FFF2-40B4-BE49-F238E27FC236}">
+                <a16:creationId xmlns:a16="http://schemas.microsoft.com/office/drawing/2014/main" id="{6ABDD323-629B-5404-85C8-3CD3D0E3402F}"/>
+              </a:ext>
+            </a:extLst>
+          </p:cNvPr>
+          <p:cNvSpPr>
+            <a:spLocks noGrp="1"/>
+          </p:cNvSpPr>
+          <p:nvPr>
+            <p:ph idx="1"/>
+          </p:nvPr>
+        </p:nvSpPr>
+        <p:spPr/>
+        <p:txBody>
+          <a:bodyPr/>
+          <a:lstStyle/>
+          <a:p>
+            <a:endParaRPr lang="fr-FR"/>
+          </a:p>
+        </p:txBody>
+      </p:sp>
+      <p:pic>
+        <p:nvPicPr>
+          <p:cNvPr id="1026" name="Picture 2" descr="retrieval_diagram">
+            <a:extLst>
+              <a:ext uri="{FF2B5EF4-FFF2-40B4-BE49-F238E27FC236}">
+                <a16:creationId xmlns:a16="http://schemas.microsoft.com/office/drawing/2014/main" id="{AE830D2C-C82D-4590-43C4-4C8B75CEC73A}"/>
+              </a:ext>
+            </a:extLst>
+          </p:cNvPr>
+          <p:cNvPicPr>
+            <a:picLocks noChangeAspect="1" noChangeArrowheads="1"/>
+          </p:cNvPicPr>
+          <p:nvPr/>
+        </p:nvPicPr>
+        <p:blipFill>
+          <a:blip r:embed="rId2" cstate="print">
+            <a:extLst>
+              <a:ext uri="{28A0092B-C50C-407E-A947-70E740481C1C}">
+                <a14:useLocalDpi xmlns:a14="http://schemas.microsoft.com/office/drawing/2010/main" val="0"/>
+              </a:ext>
+            </a:extLst>
+          </a:blip>
+          <a:srcRect/>
+          <a:stretch>
+            <a:fillRect/>
+          </a:stretch>
+        </p:blipFill>
+        <p:spPr bwMode="auto">
+          <a:xfrm>
+            <a:off x="0" y="1082675"/>
+            <a:ext cx="9144000" cy="4691063"/>
+          </a:xfrm>
+          <a:prstGeom prst="rect">
+            <a:avLst/>
+          </a:prstGeom>
+          <a:noFill/>
+          <a:extLst>
+            <a:ext uri="{909E8E84-426E-40DD-AFC4-6F175D3DCCD1}">
+              <a14:hiddenFill xmlns:a14="http://schemas.microsoft.com/office/drawing/2010/main">
+                <a:solidFill>
+                  <a:srgbClr val="FFFFFF"/>
+                </a:solidFill>
+              </a14:hiddenFill>
+            </a:ext>
+          </a:extLst>
+        </p:spPr>
+      </p:pic>
+    </p:spTree>
+    <p:extLst>
+      <p:ext uri="{BB962C8B-B14F-4D97-AF65-F5344CB8AC3E}">
+        <p14:creationId xmlns:p14="http://schemas.microsoft.com/office/powerpoint/2010/main" val="2838637778"/>
+      </p:ext>
+    </p:extLst>
+  </p:cSld>
+  <p:clrMapOvr>
+    <a:masterClrMapping/>
+  </p:clrMapOvr>
+</p:sld>
+</file>
+
+<file path=ppt/slides/slide6.xml><?xml version="1.0" encoding="utf-8"?>
+<p:sld xmlns:a="http://schemas.openxmlformats.org/drawingml/2006/main" xmlns:r="http://schemas.openxmlformats.org/officeDocument/2006/relationships" xmlns:p="http://schemas.openxmlformats.org/presentationml/2006/main">
+  <p:cSld>
+    <p:spTree>
+      <p:nvGrpSpPr>
+        <p:cNvPr id="1" name=""/>
+        <p:cNvGrpSpPr/>
+        <p:nvPr/>
+      </p:nvGrpSpPr>
+      <p:grpSpPr>
+        <a:xfrm>
+          <a:off x="0" y="0"/>
+          <a:ext cx="0" cy="0"/>
+          <a:chOff x="0" y="0"/>
+          <a:chExt cx="0" cy="0"/>
+        </a:xfrm>
+      </p:grpSpPr>
+      <p:sp>
+        <p:nvSpPr>
+          <p:cNvPr id="2" name="Titre 1">
+            <a:extLst>
+              <a:ext uri="{FF2B5EF4-FFF2-40B4-BE49-F238E27FC236}">
                 <a16:creationId xmlns:a16="http://schemas.microsoft.com/office/drawing/2014/main" id="{01EF1CA9-48A4-1270-8CE8-2AAEB2DF3816}"/>
               </a:ext>
             </a:extLst>
@@ -4156,7 +4389,7 @@
 </p:sld>
 </file>
 
-<file path=ppt/slides/slide5.xml><?xml version="1.0" encoding="utf-8"?>
+<file path=ppt/slides/slide7.xml><?xml version="1.0" encoding="utf-8"?>
 <p:sld xmlns:a="http://schemas.openxmlformats.org/drawingml/2006/main" xmlns:r="http://schemas.openxmlformats.org/officeDocument/2006/relationships" xmlns:p="http://schemas.openxmlformats.org/presentationml/2006/main">
   <p:cSld>
     <p:spTree>
@@ -4271,7 +4504,7 @@
 </p:sld>
 </file>
 
-<file path=ppt/slides/slide6.xml><?xml version="1.0" encoding="utf-8"?>
+<file path=ppt/slides/slide8.xml><?xml version="1.0" encoding="utf-8"?>
 <p:sld xmlns:a="http://schemas.openxmlformats.org/drawingml/2006/main" xmlns:r="http://schemas.openxmlformats.org/officeDocument/2006/relationships" xmlns:p="http://schemas.openxmlformats.org/presentationml/2006/main">
   <p:cSld>
     <p:spTree>
@@ -4433,7 +4666,7 @@
 </p:sld>
 </file>
 
-<file path=ppt/slides/slide7.xml><?xml version="1.0" encoding="utf-8"?>
+<file path=ppt/slides/slide9.xml><?xml version="1.0" encoding="utf-8"?>
 <p:sld xmlns:a="http://schemas.openxmlformats.org/drawingml/2006/main" xmlns:r="http://schemas.openxmlformats.org/officeDocument/2006/relationships" xmlns:p="http://schemas.openxmlformats.org/presentationml/2006/main">
   <p:cSld>
     <p:spTree>

--- a/ppt/RAG03-RAG.pptx
+++ b/ppt/RAG03-RAG.pptx
@@ -5,10 +5,10 @@
     <p:sldMasterId id="2147483653" r:id="rId1"/>
   </p:sldMasterIdLst>
   <p:notesMasterIdLst>
-    <p:notesMasterId r:id="rId11"/>
+    <p:notesMasterId r:id="rId14"/>
   </p:notesMasterIdLst>
   <p:handoutMasterIdLst>
-    <p:handoutMasterId r:id="rId12"/>
+    <p:handoutMasterId r:id="rId15"/>
   </p:handoutMasterIdLst>
   <p:sldIdLst>
     <p:sldId id="264" r:id="rId2"/>
@@ -20,6 +20,9 @@
     <p:sldId id="277" r:id="rId8"/>
     <p:sldId id="268" r:id="rId9"/>
     <p:sldId id="276" r:id="rId10"/>
+    <p:sldId id="288" r:id="rId11"/>
+    <p:sldId id="289" r:id="rId12"/>
+    <p:sldId id="290" r:id="rId13"/>
   </p:sldIdLst>
   <p:sldSz cx="9144000" cy="6858000" type="screen4x3"/>
   <p:notesSz cx="6648450" cy="9782175"/>
@@ -3772,6 +3775,394 @@
 </p:sld>
 </file>
 
+<file path=ppt/slides/slide10.xml><?xml version="1.0" encoding="utf-8"?>
+<p:sld xmlns:a="http://schemas.openxmlformats.org/drawingml/2006/main" xmlns:r="http://schemas.openxmlformats.org/officeDocument/2006/relationships" xmlns:p="http://schemas.openxmlformats.org/presentationml/2006/main">
+  <p:cSld>
+    <p:spTree>
+      <p:nvGrpSpPr>
+        <p:cNvPr id="1" name=""/>
+        <p:cNvGrpSpPr/>
+        <p:nvPr/>
+      </p:nvGrpSpPr>
+      <p:grpSpPr>
+        <a:xfrm>
+          <a:off x="0" y="0"/>
+          <a:ext cx="0" cy="0"/>
+          <a:chOff x="0" y="0"/>
+          <a:chExt cx="0" cy="0"/>
+        </a:xfrm>
+      </p:grpSpPr>
+      <p:sp>
+        <p:nvSpPr>
+          <p:cNvPr id="2" name="Titre 1">
+            <a:extLst>
+              <a:ext uri="{FF2B5EF4-FFF2-40B4-BE49-F238E27FC236}">
+                <a16:creationId xmlns:a16="http://schemas.microsoft.com/office/drawing/2014/main" id="{FFE80F7A-6628-0BCD-F841-7B87812835B1}"/>
+              </a:ext>
+            </a:extLst>
+          </p:cNvPr>
+          <p:cNvSpPr>
+            <a:spLocks noGrp="1"/>
+          </p:cNvSpPr>
+          <p:nvPr>
+            <p:ph type="title"/>
+          </p:nvPr>
+        </p:nvSpPr>
+        <p:spPr/>
+        <p:txBody>
+          <a:bodyPr/>
+          <a:lstStyle/>
+          <a:p>
+            <a:r>
+              <a:rPr lang="fr-FR" dirty="0" err="1"/>
+              <a:t>Chunking</a:t>
+            </a:r>
+            <a:endParaRPr lang="fr-FR" dirty="0"/>
+          </a:p>
+        </p:txBody>
+      </p:sp>
+      <p:sp>
+        <p:nvSpPr>
+          <p:cNvPr id="3" name="Espace réservé du contenu 2">
+            <a:extLst>
+              <a:ext uri="{FF2B5EF4-FFF2-40B4-BE49-F238E27FC236}">
+                <a16:creationId xmlns:a16="http://schemas.microsoft.com/office/drawing/2014/main" id="{EBAEECF1-D815-EC56-EFF3-8BB5D58BD30C}"/>
+              </a:ext>
+            </a:extLst>
+          </p:cNvPr>
+          <p:cNvSpPr>
+            <a:spLocks noGrp="1"/>
+          </p:cNvSpPr>
+          <p:nvPr>
+            <p:ph idx="1"/>
+          </p:nvPr>
+        </p:nvSpPr>
+        <p:spPr/>
+        <p:txBody>
+          <a:bodyPr/>
+          <a:lstStyle/>
+          <a:p>
+            <a:r>
+              <a:rPr lang="fr-FR" dirty="0"/>
+              <a:t>Le </a:t>
+            </a:r>
+            <a:r>
+              <a:rPr lang="fr-FR" dirty="0" err="1"/>
+              <a:t>Chunk</a:t>
+            </a:r>
+            <a:r>
+              <a:rPr lang="fr-FR" dirty="0"/>
+              <a:t> est un transformer qui va découper le document</a:t>
+            </a:r>
+          </a:p>
+          <a:p>
+            <a:pPr lvl="1"/>
+            <a:r>
+              <a:rPr lang="fr-FR" dirty="0"/>
+              <a:t>Suivant une logique</a:t>
+            </a:r>
+          </a:p>
+          <a:p>
+            <a:pPr lvl="1"/>
+            <a:r>
+              <a:rPr lang="fr-FR" dirty="0"/>
+              <a:t>Une taille</a:t>
+            </a:r>
+          </a:p>
+          <a:p>
+            <a:pPr lvl="1"/>
+            <a:r>
+              <a:rPr lang="fr-FR" dirty="0"/>
+              <a:t>…</a:t>
+            </a:r>
+          </a:p>
+          <a:p>
+            <a:pPr lvl="1"/>
+            <a:r>
+              <a:rPr lang="fr-FR" dirty="0"/>
+              <a:t>Voir chapitre suivant</a:t>
+            </a:r>
+          </a:p>
+        </p:txBody>
+      </p:sp>
+    </p:spTree>
+    <p:extLst>
+      <p:ext uri="{BB962C8B-B14F-4D97-AF65-F5344CB8AC3E}">
+        <p14:creationId xmlns:p14="http://schemas.microsoft.com/office/powerpoint/2010/main" val="1353480453"/>
+      </p:ext>
+    </p:extLst>
+  </p:cSld>
+  <p:clrMapOvr>
+    <a:masterClrMapping/>
+  </p:clrMapOvr>
+</p:sld>
+</file>
+
+<file path=ppt/slides/slide11.xml><?xml version="1.0" encoding="utf-8"?>
+<p:sld xmlns:a="http://schemas.openxmlformats.org/drawingml/2006/main" xmlns:r="http://schemas.openxmlformats.org/officeDocument/2006/relationships" xmlns:p="http://schemas.openxmlformats.org/presentationml/2006/main">
+  <p:cSld>
+    <p:spTree>
+      <p:nvGrpSpPr>
+        <p:cNvPr id="1" name=""/>
+        <p:cNvGrpSpPr/>
+        <p:nvPr/>
+      </p:nvGrpSpPr>
+      <p:grpSpPr>
+        <a:xfrm>
+          <a:off x="0" y="0"/>
+          <a:ext cx="0" cy="0"/>
+          <a:chOff x="0" y="0"/>
+          <a:chExt cx="0" cy="0"/>
+        </a:xfrm>
+      </p:grpSpPr>
+      <p:sp>
+        <p:nvSpPr>
+          <p:cNvPr id="2" name="Titre 1">
+            <a:extLst>
+              <a:ext uri="{FF2B5EF4-FFF2-40B4-BE49-F238E27FC236}">
+                <a16:creationId xmlns:a16="http://schemas.microsoft.com/office/drawing/2014/main" id="{4DDF7322-0CCC-53E1-5798-7F2509412A55}"/>
+              </a:ext>
+            </a:extLst>
+          </p:cNvPr>
+          <p:cNvSpPr>
+            <a:spLocks noGrp="1"/>
+          </p:cNvSpPr>
+          <p:nvPr>
+            <p:ph type="title"/>
+          </p:nvPr>
+        </p:nvSpPr>
+        <p:spPr/>
+        <p:txBody>
+          <a:bodyPr/>
+          <a:lstStyle/>
+          <a:p>
+            <a:r>
+              <a:rPr lang="fr-FR" dirty="0"/>
+              <a:t>Vectorisation</a:t>
+            </a:r>
+          </a:p>
+        </p:txBody>
+      </p:sp>
+      <p:sp>
+        <p:nvSpPr>
+          <p:cNvPr id="3" name="Espace réservé du contenu 2">
+            <a:extLst>
+              <a:ext uri="{FF2B5EF4-FFF2-40B4-BE49-F238E27FC236}">
+                <a16:creationId xmlns:a16="http://schemas.microsoft.com/office/drawing/2014/main" id="{FA518453-1905-D42F-4E62-54DACEB8E0CF}"/>
+              </a:ext>
+            </a:extLst>
+          </p:cNvPr>
+          <p:cNvSpPr>
+            <a:spLocks noGrp="1"/>
+          </p:cNvSpPr>
+          <p:nvPr>
+            <p:ph idx="1"/>
+          </p:nvPr>
+        </p:nvSpPr>
+        <p:spPr/>
+        <p:txBody>
+          <a:bodyPr/>
+          <a:lstStyle/>
+          <a:p>
+            <a:r>
+              <a:rPr lang="fr-FR" dirty="0"/>
+              <a:t>La vectorisation est un Transformer qui transforme un objet en un vecteur algébrique</a:t>
+            </a:r>
+          </a:p>
+          <a:p>
+            <a:pPr lvl="1"/>
+            <a:r>
+              <a:rPr lang="fr-FR" dirty="0"/>
+              <a:t>Par exemple du texte</a:t>
+            </a:r>
+          </a:p>
+          <a:p>
+            <a:r>
+              <a:rPr lang="fr-FR" dirty="0"/>
+              <a:t>Puis de le stocker</a:t>
+            </a:r>
+          </a:p>
+          <a:p>
+            <a:r>
+              <a:rPr lang="fr-FR" dirty="0"/>
+              <a:t>Puis de l'envoyer au LLM</a:t>
+            </a:r>
+          </a:p>
+          <a:p>
+            <a:pPr lvl="1"/>
+            <a:r>
+              <a:rPr lang="fr-FR" dirty="0"/>
+              <a:t>On parle alors d'</a:t>
+            </a:r>
+            <a:r>
+              <a:rPr lang="fr-FR" dirty="0" err="1"/>
+              <a:t>embeddings</a:t>
+            </a:r>
+            <a:endParaRPr lang="fr-FR" dirty="0"/>
+          </a:p>
+          <a:p>
+            <a:endParaRPr lang="fr-FR" dirty="0"/>
+          </a:p>
+        </p:txBody>
+      </p:sp>
+    </p:spTree>
+    <p:extLst>
+      <p:ext uri="{BB962C8B-B14F-4D97-AF65-F5344CB8AC3E}">
+        <p14:creationId xmlns:p14="http://schemas.microsoft.com/office/powerpoint/2010/main" val="4159851560"/>
+      </p:ext>
+    </p:extLst>
+  </p:cSld>
+  <p:clrMapOvr>
+    <a:masterClrMapping/>
+  </p:clrMapOvr>
+</p:sld>
+</file>
+
+<file path=ppt/slides/slide12.xml><?xml version="1.0" encoding="utf-8"?>
+<p:sld xmlns:a="http://schemas.openxmlformats.org/drawingml/2006/main" xmlns:r="http://schemas.openxmlformats.org/officeDocument/2006/relationships" xmlns:p="http://schemas.openxmlformats.org/presentationml/2006/main">
+  <p:cSld>
+    <p:spTree>
+      <p:nvGrpSpPr>
+        <p:cNvPr id="1" name=""/>
+        <p:cNvGrpSpPr/>
+        <p:nvPr/>
+      </p:nvGrpSpPr>
+      <p:grpSpPr>
+        <a:xfrm>
+          <a:off x="0" y="0"/>
+          <a:ext cx="0" cy="0"/>
+          <a:chOff x="0" y="0"/>
+          <a:chExt cx="0" cy="0"/>
+        </a:xfrm>
+      </p:grpSpPr>
+      <p:sp>
+        <p:nvSpPr>
+          <p:cNvPr id="2" name="Titre 1">
+            <a:extLst>
+              <a:ext uri="{FF2B5EF4-FFF2-40B4-BE49-F238E27FC236}">
+                <a16:creationId xmlns:a16="http://schemas.microsoft.com/office/drawing/2014/main" id="{6C420DB5-0148-D6A2-8016-786B7225E827}"/>
+              </a:ext>
+            </a:extLst>
+          </p:cNvPr>
+          <p:cNvSpPr>
+            <a:spLocks noGrp="1"/>
+          </p:cNvSpPr>
+          <p:nvPr>
+            <p:ph type="title"/>
+          </p:nvPr>
+        </p:nvSpPr>
+        <p:spPr/>
+        <p:txBody>
+          <a:bodyPr/>
+          <a:lstStyle/>
+          <a:p>
+            <a:r>
+              <a:rPr lang="fr-FR" dirty="0"/>
+              <a:t>Vecteur</a:t>
+            </a:r>
+          </a:p>
+        </p:txBody>
+      </p:sp>
+      <p:sp>
+        <p:nvSpPr>
+          <p:cNvPr id="3" name="Espace réservé du contenu 2">
+            <a:extLst>
+              <a:ext uri="{FF2B5EF4-FFF2-40B4-BE49-F238E27FC236}">
+                <a16:creationId xmlns:a16="http://schemas.microsoft.com/office/drawing/2014/main" id="{6EA85809-5C0E-D57E-52E8-E16D164B9C75}"/>
+              </a:ext>
+            </a:extLst>
+          </p:cNvPr>
+          <p:cNvSpPr>
+            <a:spLocks noGrp="1"/>
+          </p:cNvSpPr>
+          <p:nvPr>
+            <p:ph idx="1"/>
+          </p:nvPr>
+        </p:nvSpPr>
+        <p:spPr/>
+        <p:txBody>
+          <a:bodyPr/>
+          <a:lstStyle/>
+          <a:p>
+            <a:r>
+              <a:rPr lang="fr-FR" dirty="0"/>
+              <a:t>En mathématiques, un vecteur est un objet généralisant plusieurs notions provenant de la géométrie, de l'algèbre ou de la physique</a:t>
+            </a:r>
+          </a:p>
+          <a:p>
+            <a:r>
+              <a:rPr lang="fr-FR" dirty="0"/>
+              <a:t>Exemple de vecteur</a:t>
+            </a:r>
+          </a:p>
+          <a:p>
+            <a:r>
+              <a:rPr lang="fr-FR" dirty="0"/>
+              <a:t>Un vecteur peut avoir une dimension largement supérieure à 2</a:t>
+            </a:r>
+          </a:p>
+        </p:txBody>
+      </p:sp>
+      <p:pic>
+        <p:nvPicPr>
+          <p:cNvPr id="1026" name="Picture 2">
+            <a:extLst>
+              <a:ext uri="{FF2B5EF4-FFF2-40B4-BE49-F238E27FC236}">
+                <a16:creationId xmlns:a16="http://schemas.microsoft.com/office/drawing/2014/main" id="{90682371-7486-0C55-DB78-23B1A79B5185}"/>
+              </a:ext>
+            </a:extLst>
+          </p:cNvPr>
+          <p:cNvPicPr>
+            <a:picLocks noChangeAspect="1" noChangeArrowheads="1"/>
+          </p:cNvPicPr>
+          <p:nvPr/>
+        </p:nvPicPr>
+        <p:blipFill>
+          <a:blip r:embed="rId2">
+            <a:extLst>
+              <a:ext uri="{28A0092B-C50C-407E-A947-70E740481C1C}">
+                <a14:useLocalDpi xmlns:a14="http://schemas.microsoft.com/office/drawing/2010/main" val="0"/>
+              </a:ext>
+            </a:extLst>
+          </a:blip>
+          <a:srcRect/>
+          <a:stretch>
+            <a:fillRect/>
+          </a:stretch>
+        </p:blipFill>
+        <p:spPr bwMode="auto">
+          <a:xfrm>
+            <a:off x="4427984" y="4005064"/>
+            <a:ext cx="2289635" cy="1942331"/>
+          </a:xfrm>
+          <a:prstGeom prst="rect">
+            <a:avLst/>
+          </a:prstGeom>
+          <a:noFill/>
+          <a:extLst>
+            <a:ext uri="{909E8E84-426E-40DD-AFC4-6F175D3DCCD1}">
+              <a14:hiddenFill xmlns:a14="http://schemas.microsoft.com/office/drawing/2010/main">
+                <a:solidFill>
+                  <a:srgbClr val="FFFFFF"/>
+                </a:solidFill>
+              </a14:hiddenFill>
+            </a:ext>
+          </a:extLst>
+        </p:spPr>
+      </p:pic>
+    </p:spTree>
+    <p:extLst>
+      <p:ext uri="{BB962C8B-B14F-4D97-AF65-F5344CB8AC3E}">
+        <p14:creationId xmlns:p14="http://schemas.microsoft.com/office/powerpoint/2010/main" val="2917162321"/>
+      </p:ext>
+    </p:extLst>
+  </p:cSld>
+  <p:clrMapOvr>
+    <a:masterClrMapping/>
+  </p:clrMapOvr>
+</p:sld>
+</file>
+
 <file path=ppt/slides/slide2.xml><?xml version="1.0" encoding="utf-8"?>
 <p:sld xmlns:a="http://schemas.openxmlformats.org/drawingml/2006/main" xmlns:r="http://schemas.openxmlformats.org/officeDocument/2006/relationships" xmlns:p="http://schemas.openxmlformats.org/presentationml/2006/main">
   <p:cSld>
@@ -4475,17 +4866,13 @@
           </a:p>
           <a:p>
             <a:r>
-              <a:rPr lang="fr-FR" dirty="0" err="1"/>
-              <a:t>Angent</a:t>
-            </a:r>
-            <a:r>
               <a:rPr lang="fr-FR" dirty="0"/>
-              <a:t> IA</a:t>
-            </a:r>
-          </a:p>
-          <a:p>
-            <a:r>
-              <a:rPr lang="fr-FR"/>
+              <a:t>Agent IA</a:t>
+            </a:r>
+          </a:p>
+          <a:p>
+            <a:r>
+              <a:rPr lang="fr-FR" dirty="0"/>
               <a:t>Mixte</a:t>
             </a:r>
           </a:p>
